--- a/Vulcan Werke/VulkanWerke_Solution_Proposal.pptx
+++ b/Vulcan Werke/VulkanWerke_Solution_Proposal.pptx
@@ -5749,7 +5749,7 @@
                 <a:ea typeface="Aptos" pitchFamily="34" charset="-122"/>
                 <a:cs typeface="Aptos" pitchFamily="34" charset="-120"/>
               </a:rPr>
-              <a:t>Automated ISO, quality, and audit reporting</a:t>
+              <a:t>Automated manufacturing, quality, and audit reporting</a:t>
             </a:r>
             <a:endParaRPr lang="en-US" sz="1050" dirty="0"/>
           </a:p>
@@ -8217,7 +8217,7 @@
                 <a:ea typeface="Aptos" pitchFamily="34" charset="-122"/>
                 <a:cs typeface="Aptos" pitchFamily="34" charset="-120"/>
               </a:rPr>
-              <a:t>How is OEE calculated?</a:t>
+              <a:t>How is OEE* calculated?</a:t>
             </a:r>
             <a:endParaRPr lang="en-US" sz="950" dirty="0"/>
           </a:p>
@@ -8257,7 +8257,7 @@
                 <a:ea typeface="Aptos" pitchFamily="34" charset="-122"/>
                 <a:cs typeface="Aptos" pitchFamily="34" charset="-120"/>
               </a:rPr>
-              <a:t>What's needed for ISO reporting?</a:t>
+              <a:t>What's needed for reporting?</a:t>
             </a:r>
             <a:endParaRPr lang="en-US" sz="950" dirty="0"/>
           </a:p>
@@ -8408,7 +8408,7 @@
                 <a:ea typeface="Aptos" pitchFamily="34" charset="-122"/>
                 <a:cs typeface="Aptos" pitchFamily="34" charset="-120"/>
               </a:rPr>
-              <a:t>Faster onboarding</a:t>
+              <a:t>Better knowledge retention</a:t>
             </a:r>
             <a:endParaRPr lang="en-US" sz="950" dirty="0"/>
           </a:p>
@@ -8434,22 +8434,30 @@
         <p:txBody>
           <a:bodyPr wrap="square" rtlCol="0" anchor="ctr"/>
           <a:lstStyle/>
+          <a:p>
+            <a:pPr marL="342900" indent="-342900">
+              <a:buSzPct val="100000"/>
+              <a:buFontTx/>
+              <a:buChar char="•"/>
+            </a:pPr>
+            <a:r>
+              <a:rPr lang="en-US" sz="950" dirty="0">
+                <a:solidFill>
+                  <a:srgbClr val="CCCCCC"/>
+                </a:solidFill>
+                <a:latin typeface="Aptos" pitchFamily="34" charset="0"/>
+                <a:ea typeface="Aptos" pitchFamily="34" charset="-122"/>
+                <a:cs typeface="Aptos" pitchFamily="34" charset="-120"/>
+              </a:rPr>
+              <a:t>Faster onboarding</a:t>
+            </a:r>
+            <a:endParaRPr lang="en-US" sz="950" dirty="0"/>
+          </a:p>
           <a:p>
             <a:pPr marL="342900" indent="-342900">
               <a:buSzPct val="100000"/>
               <a:buChar char="•"/>
             </a:pPr>
-            <a:r>
-              <a:rPr lang="en-US" sz="950" dirty="0">
-                <a:solidFill>
-                  <a:srgbClr val="CCCCCC"/>
-                </a:solidFill>
-                <a:latin typeface="Aptos" pitchFamily="34" charset="0"/>
-                <a:ea typeface="Aptos" pitchFamily="34" charset="-122"/>
-                <a:cs typeface="Aptos" pitchFamily="34" charset="-120"/>
-              </a:rPr>
-              <a:t>Better knowledge retention</a:t>
-            </a:r>
             <a:endParaRPr lang="en-US" sz="950" dirty="0"/>
           </a:p>
         </p:txBody>
@@ -9183,7 +9191,7 @@
                 <a:ea typeface="Aptos" pitchFamily="34" charset="-122"/>
                 <a:cs typeface="Aptos" pitchFamily="34" charset="-120"/>
               </a:rPr>
-              <a:t>ISO 9001 reports</a:t>
+              <a:t>Manufacturing reports</a:t>
             </a:r>
             <a:endParaRPr lang="en-US" sz="950" dirty="0"/>
           </a:p>
@@ -9457,6 +9465,51 @@
               <a:t>Consistent documentation</a:t>
             </a:r>
             <a:endParaRPr lang="en-US" sz="950" dirty="0"/>
+          </a:p>
+        </p:txBody>
+      </p:sp>
+      <p:sp>
+        <p:nvSpPr>
+          <p:cNvPr id="50" name="Text 15">
+            <a:extLst>
+              <a:ext uri="{FF2B5EF4-FFF2-40B4-BE49-F238E27FC236}">
+                <a16:creationId xmlns:a16="http://schemas.microsoft.com/office/drawing/2014/main" id="{B766F803-2094-9E6A-D252-B0EA8937DC4A}"/>
+              </a:ext>
+            </a:extLst>
+          </p:cNvPr>
+          <p:cNvSpPr/>
+          <p:nvPr/>
+        </p:nvSpPr>
+        <p:spPr>
+          <a:xfrm>
+            <a:off x="1796542" y="4567428"/>
+            <a:ext cx="1321562" cy="187452"/>
+          </a:xfrm>
+          <a:prstGeom prst="rect">
+            <a:avLst/>
+          </a:prstGeom>
+          <a:noFill/>
+          <a:ln/>
+        </p:spPr>
+        <p:txBody>
+          <a:bodyPr wrap="square" rtlCol="0" anchor="ctr"/>
+          <a:lstStyle/>
+          <a:p>
+            <a:pPr>
+              <a:buSzPct val="100000"/>
+            </a:pPr>
+            <a:r>
+              <a:rPr lang="en-US" sz="600" dirty="0">
+                <a:solidFill>
+                  <a:srgbClr val="CCCCCC"/>
+                </a:solidFill>
+                <a:latin typeface="Aptos" pitchFamily="34" charset="0"/>
+                <a:ea typeface="Aptos" pitchFamily="34" charset="-122"/>
+                <a:cs typeface="Aptos" pitchFamily="34" charset="-120"/>
+              </a:rPr>
+              <a:t>*Overall Equipment Effectiveness</a:t>
+            </a:r>
+            <a:endParaRPr lang="en-US" sz="600" dirty="0"/>
           </a:p>
         </p:txBody>
       </p:sp>
@@ -13914,7 +13967,60 @@
                 <a:ea typeface="Aptos" pitchFamily="34" charset="-122"/>
                 <a:cs typeface="Aptos" pitchFamily="34" charset="-120"/>
               </a:rPr>
-              <a:t>Access · NDA · Minimization</a:t>
+              <a:t>Access Control</a:t>
+            </a:r>
+            <a:br>
+              <a:rPr lang="en-US" sz="850" dirty="0">
+                <a:solidFill>
+                  <a:srgbClr val="E63329"/>
+                </a:solidFill>
+                <a:latin typeface="Aptos" pitchFamily="34" charset="0"/>
+                <a:ea typeface="Aptos" pitchFamily="34" charset="-122"/>
+                <a:cs typeface="Aptos" pitchFamily="34" charset="-120"/>
+              </a:rPr>
+            </a:br>
+            <a:r>
+              <a:rPr lang="en-US" sz="850" dirty="0">
+                <a:solidFill>
+                  <a:srgbClr val="E63329"/>
+                </a:solidFill>
+                <a:latin typeface="Aptos" pitchFamily="34" charset="0"/>
+                <a:ea typeface="Aptos" pitchFamily="34" charset="-122"/>
+                <a:cs typeface="Aptos" pitchFamily="34" charset="-120"/>
+              </a:rPr>
+              <a:t>NDA </a:t>
+            </a:r>
+            <a:r>
+              <a:rPr lang="en-US" sz="850" dirty="0" err="1">
+                <a:solidFill>
+                  <a:srgbClr val="E63329"/>
+                </a:solidFill>
+                <a:latin typeface="Aptos" pitchFamily="34" charset="0"/>
+                <a:ea typeface="Aptos" pitchFamily="34" charset="-122"/>
+                <a:cs typeface="Aptos" pitchFamily="34" charset="-120"/>
+              </a:rPr>
+              <a:t>Protectin</a:t>
+            </a:r>
+            <a:br>
+              <a:rPr lang="en-US" sz="850" dirty="0">
+                <a:solidFill>
+                  <a:srgbClr val="E63329"/>
+                </a:solidFill>
+                <a:latin typeface="Aptos" pitchFamily="34" charset="0"/>
+                <a:ea typeface="Aptos" pitchFamily="34" charset="-122"/>
+                <a:cs typeface="Aptos" pitchFamily="34" charset="-120"/>
+              </a:rPr>
+            </a:br>
+            <a:r>
+              <a:rPr lang="en-US" sz="850" dirty="0">
+                <a:solidFill>
+                  <a:srgbClr val="E63329"/>
+                </a:solidFill>
+                <a:latin typeface="Aptos" pitchFamily="34" charset="0"/>
+                <a:ea typeface="Aptos" pitchFamily="34" charset="-122"/>
+                <a:cs typeface="Aptos" pitchFamily="34" charset="-120"/>
+              </a:rPr>
+              <a:t>Data Minimization</a:t>
             </a:r>
             <a:endParaRPr lang="en-US" sz="850" dirty="0"/>
           </a:p>
@@ -14242,7 +14348,7 @@
         </p:nvSpPr>
         <p:spPr>
           <a:xfrm>
-            <a:off x="932688" y="4498848"/>
+            <a:off x="932688" y="4590288"/>
             <a:ext cx="877824" cy="146304"/>
           </a:xfrm>
           <a:prstGeom prst="ellipse">
@@ -14416,7 +14522,7 @@
         </p:nvSpPr>
         <p:spPr>
           <a:xfrm>
-            <a:off x="2011680" y="4498848"/>
+            <a:off x="2011680" y="4590288"/>
             <a:ext cx="877824" cy="146304"/>
           </a:xfrm>
           <a:prstGeom prst="ellipse">
@@ -14590,7 +14696,7 @@
         </p:nvSpPr>
         <p:spPr>
           <a:xfrm>
-            <a:off x="3090672" y="4498848"/>
+            <a:off x="3090672" y="4590288"/>
             <a:ext cx="877824" cy="146304"/>
           </a:xfrm>
           <a:prstGeom prst="ellipse">
@@ -14731,7 +14837,7 @@
         </p:nvSpPr>
         <p:spPr>
           <a:xfrm>
-            <a:off x="4169664" y="4498848"/>
+            <a:off x="4169664" y="4590288"/>
             <a:ext cx="877824" cy="146304"/>
           </a:xfrm>
           <a:prstGeom prst="ellipse">
@@ -14893,7 +14999,7 @@
           <a:bodyPr/>
           <a:lstStyle/>
           <a:p>
-            <a:endParaRPr lang="en-US"/>
+            <a:endParaRPr lang="en-US" dirty="0"/>
           </a:p>
         </p:txBody>
       </p:sp>
@@ -14905,7 +15011,7 @@
         </p:nvSpPr>
         <p:spPr>
           <a:xfrm>
-            <a:off x="5248656" y="4498848"/>
+            <a:off x="5248656" y="4590288"/>
             <a:ext cx="877824" cy="146304"/>
           </a:xfrm>
           <a:prstGeom prst="ellipse">
@@ -14964,7 +15070,7 @@
                 <a:ea typeface="Aptos" pitchFamily="34" charset="-122"/>
                 <a:cs typeface="Aptos" pitchFamily="34" charset="-120"/>
               </a:rPr>
-              <a:t>Maint.</a:t>
+              <a:t>…</a:t>
             </a:r>
             <a:endParaRPr lang="en-US" sz="900" dirty="0"/>
           </a:p>
@@ -16615,7 +16721,7 @@
           </a:solidFill>
           <a:ln w="10160">
             <a:solidFill>
-              <a:srgbClr val="F97316"/>
+              <a:srgbClr val="22C55E"/>
             </a:solidFill>
             <a:prstDash val="solid"/>
           </a:ln>
@@ -16650,11 +16756,15 @@
             <a:avLst/>
           </a:prstGeom>
           <a:solidFill>
-            <a:srgbClr val="F97316"/>
+            <a:srgbClr val="22C55E">
+              <a:alpha val="85000"/>
+            </a:srgbClr>
           </a:solidFill>
           <a:ln w="12700">
             <a:solidFill>
-              <a:srgbClr val="F97316"/>
+              <a:srgbClr val="22C55E">
+                <a:alpha val="85000"/>
+              </a:srgbClr>
             </a:solidFill>
             <a:prstDash val="solid"/>
           </a:ln>
@@ -21900,16 +22010,16 @@
 <file path=customXml/itemProps1.xml><?xml version="1.0" encoding="utf-8"?>
 <ds:datastoreItem xmlns:ds="http://schemas.openxmlformats.org/officeDocument/2006/customXml" ds:itemID="{F7FD3CFF-D856-4895-BC8C-2D54E55CAFB2}">
   <ds:schemaRefs>
+    <ds:schemaRef ds:uri="http://purl.org/dc/terms/"/>
+    <ds:schemaRef ds:uri="http://schemas.microsoft.com/office/2006/documentManagement/types"/>
+    <ds:schemaRef ds:uri="http://purl.org/dc/elements/1.1/"/>
+    <ds:schemaRef ds:uri="1a48b24f-2696-4d0d-bf6d-8304c3ed2b04"/>
+    <ds:schemaRef ds:uri="http://schemas.microsoft.com/office/2006/metadata/properties"/>
+    <ds:schemaRef ds:uri="http://purl.org/dc/dcmitype/"/>
     <ds:schemaRef ds:uri="http://www.w3.org/XML/1998/namespace"/>
-    <ds:schemaRef ds:uri="1a48b24f-2696-4d0d-bf6d-8304c3ed2b04"/>
-    <ds:schemaRef ds:uri="http://schemas.microsoft.com/office/2006/documentManagement/types"/>
-    <ds:schemaRef ds:uri="http://purl.org/dc/dcmitype/"/>
-    <ds:schemaRef ds:uri="http://purl.org/dc/terms/"/>
-    <ds:schemaRef ds:uri="10233fac-3102-4b22-9f43-dcb6aed9aea4"/>
-    <ds:schemaRef ds:uri="http://purl.org/dc/elements/1.1/"/>
     <ds:schemaRef ds:uri="http://schemas.microsoft.com/office/infopath/2007/PartnerControls"/>
     <ds:schemaRef ds:uri="http://schemas.openxmlformats.org/package/2006/metadata/core-properties"/>
-    <ds:schemaRef ds:uri="http://schemas.microsoft.com/office/2006/metadata/properties"/>
+    <ds:schemaRef ds:uri="10233fac-3102-4b22-9f43-dcb6aed9aea4"/>
   </ds:schemaRefs>
 </ds:datastoreItem>
 </file>
